--- a/Schools_ML_Track/camp_2026/slides/DA/DA22.pptx
+++ b/Schools_ML_Track/camp_2026/slides/DA/DA22.pptx
@@ -115,7 +115,7 @@
   <p:extLst>
     <p:ext uri="{521415D9-36F7-43E2-AB2F-B90AF26B5E84}">
       <p14:sectionLst xmlns:p14="http://schemas.microsoft.com/office/powerpoint/2010/main">
-        <p14:section name="Opening" id="{b58cdf61-c850-ea3e-94c4-abc12d9a4f15}">
+        <p14:section name="Opening" id="{22097894-8d9c-94a3-c9ec-fe4876d24e20}">
           <p14:sldIdLst>
             <p14:sldId id="256"/>
             <p14:sldId id="257"/>
@@ -125,7 +125,7 @@
             <p14:sldId id="261"/>
           </p14:sldIdLst>
         </p14:section>
-        <p14:section name="Make and close" id="{ef924c43-e3e3-8b46-1931-2add215ee46d}">
+        <p14:section name="Make and close" id="{5ff1961f-960b-e4de-ed47-543e77b98aca}">
           <p14:sldIdLst>
             <p14:sldId id="262"/>
             <p14:sldId id="263"/>

--- a/Schools_ML_Track/camp_2026/slides/DA/DA22.pptx
+++ b/Schools_ML_Track/camp_2026/slides/DA/DA22.pptx
@@ -14,9 +14,10 @@
     <p:sldId id="262" r:id="rId8"/>
     <p:sldId id="263" r:id="rId9"/>
     <p:sldId id="264" r:id="rId10"/>
+    <p:sldId id="265" r:id="rId11"/>
   </p:sldIdLst>
   <p:notesMasterIdLst>
-    <p:notesMasterId r:id="rId11"/>
+    <p:notesMasterId r:id="rId12"/>
   </p:notesMasterIdLst>
   <p:sldSz cx="12192000" cy="6858000"/>
   <p:notesSz cx="6858000" cy="12192000"/>
@@ -115,7 +116,7 @@
   <p:extLst>
     <p:ext uri="{521415D9-36F7-43E2-AB2F-B90AF26B5E84}">
       <p14:sectionLst xmlns:p14="http://schemas.microsoft.com/office/powerpoint/2010/main">
-        <p14:section name="Opening" id="{22097894-8d9c-94a3-c9ec-fe4876d24e20}">
+        <p14:section name="Opening" id="{2d352833-e660-f31e-2711-927b28059cd4}">
           <p14:sldIdLst>
             <p14:sldId id="256"/>
             <p14:sldId id="257"/>
@@ -125,11 +126,12 @@
             <p14:sldId id="261"/>
           </p14:sldIdLst>
         </p14:section>
-        <p14:section name="Make and close" id="{5ff1961f-960b-e4de-ed47-543e77b98aca}">
+        <p14:section name="Make and close" id="{9afa5e24-1372-5568-35bb-00937178ec41}">
           <p14:sldIdLst>
             <p14:sldId id="262"/>
             <p14:sldId id="263"/>
             <p14:sldId id="264"/>
+            <p14:sldId id="265"/>
           </p14:sldIdLst>
         </p14:section>
       </p14:sectionLst>
@@ -580,6 +582,96 @@
 </p:notes>
 </file>
 
+<file path=ppt/notesSlides/notesSlide10.xml><?xml version="1.0" encoding="utf-8"?>
+<p:notes xmlns:a="http://schemas.openxmlformats.org/drawingml/2006/main" xmlns:r="http://schemas.openxmlformats.org/officeDocument/2006/relationships" xmlns:p="http://schemas.openxmlformats.org/presentationml/2006/main">
+  <p:cSld>
+    <p:spTree>
+      <p:nvGrpSpPr>
+        <p:cNvPr id="1" name=""/>
+        <p:cNvGrpSpPr/>
+        <p:nvPr/>
+      </p:nvGrpSpPr>
+      <p:grpSpPr>
+        <a:xfrm>
+          <a:off x="0" y="0"/>
+          <a:ext cx="0" cy="0"/>
+          <a:chOff x="0" y="0"/>
+          <a:chExt cx="0" cy="0"/>
+        </a:xfrm>
+      </p:grpSpPr>
+      <p:sp>
+        <p:nvSpPr>
+          <p:cNvPr id="2" name="Slide Image Placeholder 1"/>
+          <p:cNvSpPr>
+            <a:spLocks noGrp="1" noRot="1" noChangeAspect="1"/>
+          </p:cNvSpPr>
+          <p:nvPr>
+            <p:ph type="sldImg"/>
+          </p:nvPr>
+        </p:nvSpPr>
+        <p:spPr/>
+      </p:sp>
+      <p:sp>
+        <p:nvSpPr>
+          <p:cNvPr id="3" name="Notes Placeholder 2"/>
+          <p:cNvSpPr>
+            <a:spLocks noGrp="1"/>
+          </p:cNvSpPr>
+          <p:nvPr>
+            <p:ph type="body" idx="1"/>
+          </p:nvPr>
+        </p:nvSpPr>
+        <p:spPr/>
+        <p:txBody>
+          <a:bodyPr/>
+          <a:lstStyle/>
+          <a:p>
+            <a:r>
+              <a:rPr lang="en-US" dirty="0"/>
+              <a:t>Last step. Our question for today was: Does everything I submit open, rerun and agree with itself?
+Finish this sentence in your notebook, in your own words. Everything I submitted opens, reruns and agrees with itself.
+Then save your notebook, close it and open it again to check it saved.</a:t>
+            </a:r>
+            <a:endParaRPr lang="en-US" dirty="0"/>
+          </a:p>
+        </p:txBody>
+      </p:sp>
+      <p:sp>
+        <p:nvSpPr>
+          <p:cNvPr id="4" name="Slide Number Placeholder 3"/>
+          <p:cNvSpPr>
+            <a:spLocks noGrp="1"/>
+          </p:cNvSpPr>
+          <p:nvPr>
+            <p:ph type="sldNum" sz="quarter" idx="10"/>
+          </p:nvPr>
+        </p:nvSpPr>
+        <p:spPr/>
+        <p:txBody>
+          <a:bodyPr/>
+          <a:lstStyle/>
+          <a:p>
+            <a:fld id="{F7021451-1387-4CA6-816F-3879F97B5CBC}" type="slidenum">
+              <a:rPr lang="en-US"/>
+              <a:t>10</a:t>
+            </a:fld>
+            <a:endParaRPr lang="en-US"/>
+          </a:p>
+        </p:txBody>
+      </p:sp>
+    </p:spTree>
+    <p:extLst>
+      <p:ext uri="{BB962C8B-B14F-4D97-AF65-F5344CB8AC3E}">
+        <p14:creationId xmlns:p14="http://schemas.microsoft.com/office/powerpoint/2010/main" val="1024086991"/>
+      </p:ext>
+    </p:extLst>
+  </p:cSld>
+  <p:clrMapOvr>
+    <a:masterClrMapping/>
+  </p:clrMapOvr>
+</p:notes>
+</file>
+
 <file path=ppt/notesSlides/notesSlide2.xml><?xml version="1.0" encoding="utf-8"?>
 <p:notes xmlns:a="http://schemas.openxmlformats.org/drawingml/2006/main" xmlns:r="http://schemas.openxmlformats.org/officeDocument/2006/relationships" xmlns:p="http://schemas.openxmlformats.org/presentationml/2006/main">
   <p:cSld>
@@ -1072,7 +1164,8 @@
             <a:r>
               <a:rPr lang="en-US" dirty="0"/>
               <a:t>This task is yours. Run your code after every step so you can see where a problem begins. If you get stuck for a few minutes, read your error message, check the error card, and then ask me.
-Save it as DA22. I will come round to each of you and ask what you changed and how you checked it.</a:t>
+Save it as DA22. I will come round to each of you and ask what you changed and how you checked it.
+The rest of the brief is on the next slide.</a:t>
             </a:r>
             <a:endParaRPr lang="en-US" dirty="0"/>
           </a:p>
@@ -1160,10 +1253,7 @@
           <a:p>
             <a:r>
               <a:rPr lang="en-US" dirty="0"/>
-              <a:t>Here are two errors from this session, so you recognise them when they appear.
-This is the first one. You will see: A claim in the report has no number behind it. It means this: the sentence was written from memory and not from an output. To fix it, find the output cell that supports it, or remove the claim.
-The next one. You will see: The report opens but the charts are missing. It means this: the PNG was not saved in the same folder, or the picture was linked and not inserted. To fix it, insert the saved PNG into the document and export to PDF again.
-When you are stuck, read the last line of the message first.</a:t>
+              <a:t>Here is the rest of the brief. Take your time, and save your work as you go, because a saved file is the only thing I can mark.</a:t>
             </a:r>
             <a:endParaRPr lang="en-US" dirty="0"/>
           </a:p>
@@ -1251,9 +1341,10 @@
           <a:p>
             <a:r>
               <a:rPr lang="en-US" dirty="0"/>
-              <a:t>Last step. Our question for today was: Does everything I submit open, rerun and agree with itself?
-Finish this sentence in your notebook, in your own words. Everything I submitted opens, reruns and agrees with itself.
-Then save your notebook, close it and open it again to check it saved.</a:t>
+              <a:t>Here are two errors from this session, so you recognise them when they appear.
+This is the first one. You will see: A claim in the report has no number behind it. It means this: the sentence was written from memory and not from an output. To fix it, find the output cell that supports it, or remove the claim.
+The next one. You will see: The report opens but the charts are missing. It means this: the PNG was not saved in the same folder, or the picture was linked and not inserted. To fix it, insert the saved PNG into the document and export to PDF again.
+When you are stuck, read the last line of the message first.</a:t>
             </a:r>
             <a:endParaRPr lang="en-US" dirty="0"/>
           </a:p>
@@ -2105,6 +2196,231 @@
 </p:sld>
 </file>
 
+<file path=ppt/slides/slide10.xml><?xml version="1.0" encoding="utf-8"?>
+<p:sld xmlns:a="http://schemas.openxmlformats.org/drawingml/2006/main" xmlns:r="http://schemas.openxmlformats.org/officeDocument/2006/relationships" xmlns:p="http://schemas.openxmlformats.org/presentationml/2006/main">
+  <p:cSld name="Slide 10">
+    <p:spTree>
+      <p:nvGrpSpPr>
+        <p:cNvPr id="1" name=""/>
+        <p:cNvGrpSpPr/>
+        <p:nvPr/>
+      </p:nvGrpSpPr>
+      <p:grpSpPr>
+        <a:xfrm>
+          <a:off x="0" y="0"/>
+          <a:ext cx="0" cy="0"/>
+          <a:chOff x="0" y="0"/>
+          <a:chExt cx="0" cy="0"/>
+        </a:xfrm>
+      </p:grpSpPr>
+      <p:sp>
+        <p:nvSpPr>
+          <p:cNvPr id="2" name="Text 1"/>
+          <p:cNvSpPr/>
+          <p:nvPr>
+            <p:ph idx="102" type="title" hasCustomPrompt="1"/>
+          </p:nvPr>
+        </p:nvSpPr>
+        <p:spPr>
+          <a:xfrm>
+            <a:off x="640080" y="384048"/>
+            <a:ext cx="10881360" cy="1051560"/>
+          </a:xfrm>
+          <a:prstGeom prst="rect">
+            <a:avLst/>
+          </a:prstGeom>
+          <a:noFill/>
+          <a:ln/>
+        </p:spPr>
+        <p:txBody>
+          <a:bodyPr wrap="square" lIns="0" tIns="0" rIns="0" bIns="0" rtlCol="0" anchor="t"/>
+          <a:lstStyle/>
+          <a:p>
+            <a:pPr algn="l" indent="0" marL="0">
+              <a:buNone/>
+            </a:pPr>
+            <a:r>
+              <a:rPr lang="en-US" sz="3800" b="1" dirty="0">
+                <a:solidFill>
+                  <a:srgbClr val="111111"/>
+                </a:solidFill>
+                <a:latin typeface="Lato" pitchFamily="34" charset="0"/>
+                <a:ea typeface="Lato" pitchFamily="34" charset="-122"/>
+                <a:cs typeface="Lato" pitchFamily="34" charset="-120"/>
+              </a:rPr>
+              <a:t>Finish this sentence in your notebook</a:t>
+            </a:r>
+            <a:endParaRPr lang="en-US" sz="3800" dirty="0"/>
+          </a:p>
+        </p:txBody>
+      </p:sp>
+      <p:sp>
+        <p:nvSpPr>
+          <p:cNvPr id="3" name="Text 1"/>
+          <p:cNvSpPr txBox="1"/>
+          <p:nvPr/>
+        </p:nvSpPr>
+        <p:spPr>
+          <a:xfrm>
+            <a:off x="640080" y="1737360"/>
+            <a:ext cx="6949440" cy="2926080"/>
+          </a:xfrm>
+          <a:prstGeom prst="rect">
+            <a:avLst/>
+          </a:prstGeom>
+          <a:noFill/>
+          <a:ln/>
+        </p:spPr>
+        <p:txBody>
+          <a:bodyPr wrap="square" lIns="0" tIns="0" rIns="0" bIns="0" rtlCol="0" anchor="t"/>
+          <a:lstStyle/>
+          <a:p>
+            <a:pPr algn="l" indent="0" marL="0">
+              <a:lnSpc>
+                <a:spcPts val="4800"/>
+              </a:lnSpc>
+              <a:spcAft>
+                <a:spcPts val="1010"/>
+              </a:spcAft>
+              <a:buNone/>
+            </a:pPr>
+            <a:r>
+              <a:rPr lang="en-US" sz="4000" dirty="0">
+                <a:solidFill>
+                  <a:srgbClr val="111111"/>
+                </a:solidFill>
+                <a:latin typeface="Lato" pitchFamily="34" charset="0"/>
+                <a:ea typeface="Lato" pitchFamily="34" charset="-122"/>
+                <a:cs typeface="Lato" pitchFamily="34" charset="-120"/>
+              </a:rPr>
+              <a:t>Everything I submitted opens, reruns and agrees with itself.</a:t>
+            </a:r>
+            <a:endParaRPr lang="en-US" sz="4000" dirty="0"/>
+          </a:p>
+        </p:txBody>
+      </p:sp>
+      <p:sp>
+        <p:nvSpPr>
+          <p:cNvPr id="4" name="Text 2"/>
+          <p:cNvSpPr txBox="1"/>
+          <p:nvPr/>
+        </p:nvSpPr>
+        <p:spPr>
+          <a:xfrm>
+            <a:off x="640080" y="4846320"/>
+            <a:ext cx="6949440" cy="1097280"/>
+          </a:xfrm>
+          <a:prstGeom prst="rect">
+            <a:avLst/>
+          </a:prstGeom>
+          <a:noFill/>
+          <a:ln/>
+        </p:spPr>
+        <p:txBody>
+          <a:bodyPr wrap="square" lIns="0" tIns="0" rIns="0" bIns="0" rtlCol="0" anchor="t"/>
+          <a:lstStyle/>
+          <a:p>
+            <a:pPr algn="l" indent="0" marL="0">
+              <a:lnSpc>
+                <a:spcPts val="2750"/>
+              </a:lnSpc>
+              <a:buNone/>
+            </a:pPr>
+            <a:r>
+              <a:rPr lang="en-US" sz="2200" dirty="0">
+                <a:solidFill>
+                  <a:srgbClr val="333333"/>
+                </a:solidFill>
+                <a:latin typeface="Lato" pitchFamily="34" charset="0"/>
+                <a:ea typeface="Lato" pitchFamily="34" charset="-122"/>
+                <a:cs typeface="Lato" pitchFamily="34" charset="-120"/>
+              </a:rPr>
+              <a:t>Then save your notebook, close it and open it again to check it saved.</a:t>
+            </a:r>
+            <a:endParaRPr lang="en-US" sz="2200" dirty="0"/>
+          </a:p>
+        </p:txBody>
+      </p:sp>
+      <p:pic>
+        <p:nvPicPr>
+          <p:cNvPr id="5" name="Image 0" descr="Finished">    </p:cNvPr>
+          <p:cNvPicPr>
+            <a:picLocks noChangeAspect="1"/>
+          </p:cNvPicPr>
+          <p:nvPr/>
+        </p:nvPicPr>
+        <p:blipFill>
+          <a:blip r:embed="rId1"/>
+          <a:stretch>
+            <a:fillRect/>
+          </a:stretch>
+        </p:blipFill>
+        <p:spPr>
+          <a:xfrm>
+            <a:off x="8229600" y="1920240"/>
+            <a:ext cx="3291840" cy="3291840"/>
+          </a:xfrm>
+          <a:prstGeom prst="rect">
+            <a:avLst/>
+          </a:prstGeom>
+        </p:spPr>
+      </p:pic>
+      <p:sp>
+        <p:nvSpPr>
+          <p:cNvPr id="25" name="Slide Number Placeholder 0"/>
+          <p:cNvSpPr>
+            <a:spLocks noGrp="1"/>
+          </p:cNvSpPr>
+          <p:nvPr>
+            <p:ph type="sldNum" sz="quarter" idx="4294967295"/>
+          </p:nvPr>
+        </p:nvSpPr>
+        <p:spPr>
+          <a:xfrm>
+            <a:off x="10607040" y="6400800"/>
+            <a:ext cx="941832" cy="274320"/>
+          </a:xfrm>
+          <a:prstGeom prst="rect">
+            <a:avLst/>
+          </a:prstGeom>
+          <a:extLst>
+            <a:ext uri="{C572A759-6A51-4108-AA02-DFA0A04FC94B}">
+              <ma14:wrappingTextBoxFlag xmlns:ma14="http://schemas.microsoft.com/office/mac/drawingml/2011/main" val="0"/>
+            </a:ext>
+          </a:extLst>
+        </p:spPr>
+        <p:txBody>
+          <a:bodyPr/>
+          <a:lstStyle>
+            <a:lvl1pPr>
+              <a:defRPr sz="1200">
+                <a:solidFill>
+                  <a:srgbClr val="666666"/>
+                </a:solidFill>
+                <a:latin typeface="Lato"/>
+                <a:ea typeface="Lato"/>
+                <a:cs typeface="Lato"/>
+              </a:defRPr>
+            </a:lvl1pPr>
+          </a:lstStyle>
+          <a:p>
+            <a:pPr algn="r"/>
+            <a:fld id="{F7021451-1387-4CA6-816F-3879F97B5CBC}" type="slidenum">
+              <a:rPr b="0" lang="en-US"/>
+              <a:t>10</a:t>
+            </a:fld>
+            <a:endParaRPr lang="en-US"/>
+          </a:p>
+        </p:txBody>
+      </p:sp>
+    </p:spTree>
+  </p:cSld>
+  <p:clrMapOvr>
+    <a:masterClrMapping/>
+  </p:clrMapOvr>
+</p:sld>
+</file>
+
 <file path=ppt/slides/slide2.xml><?xml version="1.0" encoding="utf-8"?>
 <p:sld xmlns:a="http://schemas.openxmlformats.org/drawingml/2006/main" xmlns:r="http://schemas.openxmlformats.org/officeDocument/2006/relationships" xmlns:p="http://schemas.openxmlformats.org/presentationml/2006/main">
   <p:cSld name="Slide 2">
@@ -3147,7 +3463,7 @@
                 <a:ea typeface="Lato" pitchFamily="34" charset="-122"/>
                 <a:cs typeface="Lato" pitchFamily="34" charset="-120"/>
               </a:rPr>
-              <a:t>Make: your own version</a:t>
+              <a:t>Make: your own version (1 of 2)</a:t>
             </a:r>
             <a:endParaRPr lang="en-US" sz="3800" dirty="0"/>
           </a:p>
@@ -3176,15 +3492,15 @@
           <a:p>
             <a:pPr algn="l" indent="0" marL="0">
               <a:lnSpc>
-                <a:spcPts val="2640"/>
+                <a:spcPts val="3240"/>
               </a:lnSpc>
               <a:spcAft>
-                <a:spcPts val="2520"/>
+                <a:spcPts val="2020"/>
               </a:spcAft>
               <a:buNone/>
             </a:pPr>
             <a:r>
-              <a:rPr lang="en-US" sz="2200" dirty="0">
+              <a:rPr lang="en-US" sz="2700" dirty="0">
                 <a:solidFill>
                   <a:srgbClr val="111111"/>
                 </a:solidFill>
@@ -3192,22 +3508,22 @@
                 <a:ea typeface="Lato" pitchFamily="34" charset="-122"/>
                 <a:cs typeface="Lato" pitchFamily="34" charset="-120"/>
               </a:rPr>
-              <a:t>Restart the kernel and run all cells from the top. Confirm every number in the report appears in an output. Write the one-page report: question, data, method, three findings with their values, one recommendation and one limitation. Export it to PDF and reopen it. Submit project.ipynb, cleaning_log.md, your data dictionary, report.pdf or report.docx and AI_USE_LOG.md together through the route in START_HERE.md. Keep personal information out of every file.</a:t>
-            </a:r>
-            <a:endParaRPr lang="en-US" sz="2200" dirty="0"/>
+              <a:t>Restart the kernel and run all cells from the top.</a:t>
+            </a:r>
+            <a:endParaRPr lang="en-US" sz="2700" dirty="0"/>
           </a:p>
           <a:p>
             <a:pPr algn="l" indent="0" marL="0">
               <a:lnSpc>
-                <a:spcPts val="2640"/>
+                <a:spcPts val="3240"/>
               </a:lnSpc>
               <a:spcAft>
-                <a:spcPts val="2520"/>
+                <a:spcPts val="2020"/>
               </a:spcAft>
               <a:buNone/>
             </a:pPr>
             <a:r>
-              <a:rPr lang="en-US" sz="2200" dirty="0">
+              <a:rPr lang="en-US" sz="2700" dirty="0">
                 <a:solidFill>
                   <a:srgbClr val="111111"/>
                 </a:solidFill>
@@ -3215,9 +3531,55 @@
                 <a:ea typeface="Lato" pitchFamily="34" charset="-122"/>
                 <a:cs typeface="Lato" pitchFamily="34" charset="-120"/>
               </a:rPr>
-              <a:t>Save it as DA22. Write two sentences: what you changed and how you checked it.</a:t>
-            </a:r>
-            <a:endParaRPr lang="en-US" sz="2200" dirty="0"/>
+              <a:t>Confirm every number in the report appears in an output.</a:t>
+            </a:r>
+            <a:endParaRPr lang="en-US" sz="2700" dirty="0"/>
+          </a:p>
+          <a:p>
+            <a:pPr algn="l" indent="0" marL="0">
+              <a:lnSpc>
+                <a:spcPts val="3240"/>
+              </a:lnSpc>
+              <a:spcAft>
+                <a:spcPts val="2020"/>
+              </a:spcAft>
+              <a:buNone/>
+            </a:pPr>
+            <a:r>
+              <a:rPr lang="en-US" sz="2700" dirty="0">
+                <a:solidFill>
+                  <a:srgbClr val="111111"/>
+                </a:solidFill>
+                <a:latin typeface="Lato" pitchFamily="34" charset="0"/>
+                <a:ea typeface="Lato" pitchFamily="34" charset="-122"/>
+                <a:cs typeface="Lato" pitchFamily="34" charset="-120"/>
+              </a:rPr>
+              <a:t>Write the one-page report: question, data, method, three findings with their values, one recommendation and one limitation.</a:t>
+            </a:r>
+            <a:endParaRPr lang="en-US" sz="2700" dirty="0"/>
+          </a:p>
+          <a:p>
+            <a:pPr algn="l" indent="0" marL="0">
+              <a:lnSpc>
+                <a:spcPts val="3240"/>
+              </a:lnSpc>
+              <a:spcAft>
+                <a:spcPts val="2020"/>
+              </a:spcAft>
+              <a:buNone/>
+            </a:pPr>
+            <a:r>
+              <a:rPr lang="en-US" sz="2700" dirty="0">
+                <a:solidFill>
+                  <a:srgbClr val="111111"/>
+                </a:solidFill>
+                <a:latin typeface="Lato" pitchFamily="34" charset="0"/>
+                <a:ea typeface="Lato" pitchFamily="34" charset="-122"/>
+                <a:cs typeface="Lato" pitchFamily="34" charset="-120"/>
+              </a:rPr>
+              <a:t>Export it to PDF and reopen it.</a:t>
+            </a:r>
+            <a:endParaRPr lang="en-US" sz="2700" dirty="0"/>
           </a:p>
         </p:txBody>
       </p:sp>
@@ -3353,15 +3715,106 @@
                 <a:ea typeface="Lato" pitchFamily="34" charset="-122"/>
                 <a:cs typeface="Lato" pitchFamily="34" charset="-120"/>
               </a:rPr>
-              <a:t>Two errors you may meet today</a:t>
+              <a:t>Make: your own version (2 of 2)</a:t>
             </a:r>
             <a:endParaRPr lang="en-US" sz="3800" dirty="0"/>
+          </a:p>
+        </p:txBody>
+      </p:sp>
+      <p:sp>
+        <p:nvSpPr>
+          <p:cNvPr id="3" name="Text 1"/>
+          <p:cNvSpPr txBox="1"/>
+          <p:nvPr/>
+        </p:nvSpPr>
+        <p:spPr>
+          <a:xfrm>
+            <a:off x="640080" y="1737360"/>
+            <a:ext cx="6949440" cy="4480560"/>
+          </a:xfrm>
+          <a:prstGeom prst="rect">
+            <a:avLst/>
+          </a:prstGeom>
+          <a:noFill/>
+          <a:ln/>
+        </p:spPr>
+        <p:txBody>
+          <a:bodyPr wrap="square" lIns="0" tIns="0" rIns="0" bIns="0" rtlCol="0" anchor="t"/>
+          <a:lstStyle/>
+          <a:p>
+            <a:pPr algn="l" indent="0" marL="0">
+              <a:lnSpc>
+                <a:spcPts val="3240"/>
+              </a:lnSpc>
+              <a:spcAft>
+                <a:spcPts val="2020"/>
+              </a:spcAft>
+              <a:buNone/>
+            </a:pPr>
+            <a:r>
+              <a:rPr lang="en-US" sz="2700" dirty="0">
+                <a:solidFill>
+                  <a:srgbClr val="111111"/>
+                </a:solidFill>
+                <a:latin typeface="Lato" pitchFamily="34" charset="0"/>
+                <a:ea typeface="Lato" pitchFamily="34" charset="-122"/>
+                <a:cs typeface="Lato" pitchFamily="34" charset="-120"/>
+              </a:rPr>
+              <a:t>Submit project.ipynb, cleaning_log.md, your data dictionary, report.pdf or report.docx and AI_USE_LOG.md together through the route in START_HERE.md.</a:t>
+            </a:r>
+            <a:endParaRPr lang="en-US" sz="2700" dirty="0"/>
+          </a:p>
+          <a:p>
+            <a:pPr algn="l" indent="0" marL="0">
+              <a:lnSpc>
+                <a:spcPts val="3240"/>
+              </a:lnSpc>
+              <a:spcAft>
+                <a:spcPts val="2020"/>
+              </a:spcAft>
+              <a:buNone/>
+            </a:pPr>
+            <a:r>
+              <a:rPr lang="en-US" sz="2700" dirty="0">
+                <a:solidFill>
+                  <a:srgbClr val="111111"/>
+                </a:solidFill>
+                <a:latin typeface="Lato" pitchFamily="34" charset="0"/>
+                <a:ea typeface="Lato" pitchFamily="34" charset="-122"/>
+                <a:cs typeface="Lato" pitchFamily="34" charset="-120"/>
+              </a:rPr>
+              <a:t>Keep personal information out of every file.</a:t>
+            </a:r>
+            <a:endParaRPr lang="en-US" sz="2700" dirty="0"/>
+          </a:p>
+          <a:p>
+            <a:pPr algn="l" indent="0" marL="0">
+              <a:lnSpc>
+                <a:spcPts val="3240"/>
+              </a:lnSpc>
+              <a:spcAft>
+                <a:spcPts val="2020"/>
+              </a:spcAft>
+              <a:buNone/>
+            </a:pPr>
+            <a:r>
+              <a:rPr lang="en-US" sz="2700" dirty="0">
+                <a:solidFill>
+                  <a:srgbClr val="111111"/>
+                </a:solidFill>
+                <a:latin typeface="Lato" pitchFamily="34" charset="0"/>
+                <a:ea typeface="Lato" pitchFamily="34" charset="-122"/>
+                <a:cs typeface="Lato" pitchFamily="34" charset="-120"/>
+              </a:rPr>
+              <a:t>Save it as DA22. Write two sentences: what you changed and how you checked it.</a:t>
+            </a:r>
+            <a:endParaRPr lang="en-US" sz="2700" dirty="0"/>
           </a:p>
         </p:txBody>
       </p:sp>
       <p:pic>
         <p:nvPicPr>
-          <p:cNvPr id="3" name="Image 0" descr="Error">    </p:cNvPr>
+          <p:cNvPr id="4" name="Image 0" descr="A notebook saved with a tick">    </p:cNvPr>
           <p:cNvPicPr>
             <a:picLocks noChangeAspect="1"/>
           </p:cNvPicPr>
@@ -3375,335 +3828,14 @@
         </p:blipFill>
         <p:spPr>
           <a:xfrm>
-            <a:off x="640080" y="1691640"/>
-            <a:ext cx="822960" cy="822960"/>
+            <a:off x="8138160" y="1920240"/>
+            <a:ext cx="3474720" cy="3291840"/>
           </a:xfrm>
           <a:prstGeom prst="rect">
             <a:avLst/>
           </a:prstGeom>
         </p:spPr>
       </p:pic>
-      <p:sp>
-        <p:nvSpPr>
-          <p:cNvPr id="4" name="Shape 1"/>
-          <p:cNvSpPr/>
-          <p:nvPr/>
-        </p:nvSpPr>
-        <p:spPr>
-          <a:xfrm>
-            <a:off x="1645920" y="1828800"/>
-            <a:ext cx="4023360" cy="1645920"/>
-          </a:xfrm>
-          <a:prstGeom prst="roundRect">
-            <a:avLst>
-              <a:gd name="adj" fmla="val 3333"/>
-            </a:avLst>
-          </a:prstGeom>
-          <a:solidFill>
-            <a:srgbClr val="FFFFFF"/>
-          </a:solidFill>
-          <a:ln w="25400">
-            <a:solidFill>
-              <a:srgbClr val="AE2525"/>
-            </a:solidFill>
-            <a:prstDash val="solid"/>
-          </a:ln>
-        </p:spPr>
-      </p:sp>
-      <p:sp>
-        <p:nvSpPr>
-          <p:cNvPr id="5" name="Text 2"/>
-          <p:cNvSpPr txBox="1"/>
-          <p:nvPr/>
-        </p:nvSpPr>
-        <p:spPr>
-          <a:xfrm>
-            <a:off x="1783080" y="1920240"/>
-            <a:ext cx="3749040" cy="1463040"/>
-          </a:xfrm>
-          <a:prstGeom prst="rect">
-            <a:avLst/>
-          </a:prstGeom>
-          <a:noFill/>
-          <a:ln/>
-        </p:spPr>
-        <p:txBody>
-          <a:bodyPr wrap="square" lIns="0" tIns="0" rIns="0" bIns="0" rtlCol="0" anchor="ctr"/>
-          <a:lstStyle/>
-          <a:p>
-            <a:pPr algn="l" indent="0" marL="0">
-              <a:lnSpc>
-                <a:spcPts val="2500"/>
-              </a:lnSpc>
-              <a:buNone/>
-            </a:pPr>
-            <a:r>
-              <a:rPr lang="en-US" sz="2000" dirty="0">
-                <a:solidFill>
-                  <a:srgbClr val="AE2525"/>
-                </a:solidFill>
-                <a:latin typeface="Courier New" pitchFamily="34" charset="0"/>
-                <a:ea typeface="Courier New" pitchFamily="34" charset="-122"/>
-                <a:cs typeface="Courier New" pitchFamily="34" charset="-120"/>
-              </a:rPr>
-              <a:t>A claim in the report has no number behind it</a:t>
-            </a:r>
-            <a:endParaRPr lang="en-US" sz="2000" dirty="0"/>
-          </a:p>
-        </p:txBody>
-      </p:sp>
-      <p:sp>
-        <p:nvSpPr>
-          <p:cNvPr id="6" name="Text 3"/>
-          <p:cNvSpPr txBox="1"/>
-          <p:nvPr/>
-        </p:nvSpPr>
-        <p:spPr>
-          <a:xfrm>
-            <a:off x="6035040" y="1664208"/>
-            <a:ext cx="5486400" cy="1965960"/>
-          </a:xfrm>
-          <a:prstGeom prst="rect">
-            <a:avLst/>
-          </a:prstGeom>
-          <a:noFill/>
-          <a:ln/>
-        </p:spPr>
-        <p:txBody>
-          <a:bodyPr wrap="square" lIns="0" tIns="0" rIns="0" bIns="0" rtlCol="0" anchor="t"/>
-          <a:lstStyle/>
-          <a:p>
-            <a:pPr algn="l" indent="0" marL="0">
-              <a:lnSpc>
-                <a:spcPts val="2640"/>
-              </a:lnSpc>
-              <a:spcAft>
-                <a:spcPts val="1300"/>
-              </a:spcAft>
-              <a:buNone/>
-            </a:pPr>
-            <a:r>
-              <a:rPr lang="en-US" sz="2200" dirty="0">
-                <a:solidFill>
-                  <a:srgbClr val="111111"/>
-                </a:solidFill>
-                <a:latin typeface="Lato" pitchFamily="34" charset="0"/>
-                <a:ea typeface="Lato" pitchFamily="34" charset="-122"/>
-                <a:cs typeface="Lato" pitchFamily="34" charset="-120"/>
-              </a:rPr>
-              <a:t>It means: The sentence was written from memory and not from an output.</a:t>
-            </a:r>
-            <a:endParaRPr lang="en-US" sz="2200" dirty="0"/>
-          </a:p>
-          <a:p>
-            <a:pPr algn="l" indent="0" marL="0">
-              <a:lnSpc>
-                <a:spcPts val="2640"/>
-              </a:lnSpc>
-              <a:spcAft>
-                <a:spcPts val="1300"/>
-              </a:spcAft>
-              <a:buNone/>
-            </a:pPr>
-            <a:r>
-              <a:rPr lang="en-US" sz="2200" dirty="0">
-                <a:solidFill>
-                  <a:srgbClr val="111111"/>
-                </a:solidFill>
-                <a:latin typeface="Lato" pitchFamily="34" charset="0"/>
-                <a:ea typeface="Lato" pitchFamily="34" charset="-122"/>
-                <a:cs typeface="Lato" pitchFamily="34" charset="-120"/>
-              </a:rPr>
-              <a:t>Fix: Find the output cell that supports it, or remove the claim.</a:t>
-            </a:r>
-            <a:endParaRPr lang="en-US" sz="2200" dirty="0"/>
-          </a:p>
-        </p:txBody>
-      </p:sp>
-      <p:sp>
-        <p:nvSpPr>
-          <p:cNvPr id="7" name="Shape 4"/>
-          <p:cNvSpPr/>
-          <p:nvPr/>
-        </p:nvSpPr>
-        <p:spPr>
-          <a:xfrm>
-            <a:off x="640080" y="3813048"/>
-            <a:ext cx="10881360" cy="0"/>
-          </a:xfrm>
-          <a:prstGeom prst="line">
-            <a:avLst/>
-          </a:prstGeom>
-          <a:noFill/>
-          <a:ln w="12700">
-            <a:solidFill>
-              <a:srgbClr val="CFCFCF"/>
-            </a:solidFill>
-            <a:prstDash val="solid"/>
-          </a:ln>
-        </p:spPr>
-      </p:sp>
-      <p:pic>
-        <p:nvPicPr>
-          <p:cNvPr id="8" name="Image 1" descr="Error">    </p:cNvPr>
-          <p:cNvPicPr>
-            <a:picLocks noChangeAspect="1"/>
-          </p:cNvPicPr>
-          <p:nvPr/>
-        </p:nvPicPr>
-        <p:blipFill>
-          <a:blip r:embed="rId2"/>
-          <a:stretch>
-            <a:fillRect/>
-          </a:stretch>
-        </p:blipFill>
-        <p:spPr>
-          <a:xfrm>
-            <a:off x="640080" y="4023360"/>
-            <a:ext cx="822960" cy="822960"/>
-          </a:xfrm>
-          <a:prstGeom prst="rect">
-            <a:avLst/>
-          </a:prstGeom>
-        </p:spPr>
-      </p:pic>
-      <p:sp>
-        <p:nvSpPr>
-          <p:cNvPr id="9" name="Shape 5"/>
-          <p:cNvSpPr/>
-          <p:nvPr/>
-        </p:nvSpPr>
-        <p:spPr>
-          <a:xfrm>
-            <a:off x="1645920" y="4160520"/>
-            <a:ext cx="4023360" cy="1645920"/>
-          </a:xfrm>
-          <a:prstGeom prst="roundRect">
-            <a:avLst>
-              <a:gd name="adj" fmla="val 3333"/>
-            </a:avLst>
-          </a:prstGeom>
-          <a:solidFill>
-            <a:srgbClr val="FFFFFF"/>
-          </a:solidFill>
-          <a:ln w="25400">
-            <a:solidFill>
-              <a:srgbClr val="AE2525"/>
-            </a:solidFill>
-            <a:prstDash val="solid"/>
-          </a:ln>
-        </p:spPr>
-      </p:sp>
-      <p:sp>
-        <p:nvSpPr>
-          <p:cNvPr id="10" name="Text 6"/>
-          <p:cNvSpPr txBox="1"/>
-          <p:nvPr/>
-        </p:nvSpPr>
-        <p:spPr>
-          <a:xfrm>
-            <a:off x="1783080" y="4251960"/>
-            <a:ext cx="3749040" cy="1463040"/>
-          </a:xfrm>
-          <a:prstGeom prst="rect">
-            <a:avLst/>
-          </a:prstGeom>
-          <a:noFill/>
-          <a:ln/>
-        </p:spPr>
-        <p:txBody>
-          <a:bodyPr wrap="square" lIns="0" tIns="0" rIns="0" bIns="0" rtlCol="0" anchor="ctr"/>
-          <a:lstStyle/>
-          <a:p>
-            <a:pPr algn="l" indent="0" marL="0">
-              <a:lnSpc>
-                <a:spcPts val="2500"/>
-              </a:lnSpc>
-              <a:buNone/>
-            </a:pPr>
-            <a:r>
-              <a:rPr lang="en-US" sz="2000" dirty="0">
-                <a:solidFill>
-                  <a:srgbClr val="AE2525"/>
-                </a:solidFill>
-                <a:latin typeface="Courier New" pitchFamily="34" charset="0"/>
-                <a:ea typeface="Courier New" pitchFamily="34" charset="-122"/>
-                <a:cs typeface="Courier New" pitchFamily="34" charset="-120"/>
-              </a:rPr>
-              <a:t>The report opens but the charts are missing</a:t>
-            </a:r>
-            <a:endParaRPr lang="en-US" sz="2000" dirty="0"/>
-          </a:p>
-        </p:txBody>
-      </p:sp>
-      <p:sp>
-        <p:nvSpPr>
-          <p:cNvPr id="11" name="Text 7"/>
-          <p:cNvSpPr txBox="1"/>
-          <p:nvPr/>
-        </p:nvSpPr>
-        <p:spPr>
-          <a:xfrm>
-            <a:off x="6035040" y="3995928"/>
-            <a:ext cx="5486400" cy="1965960"/>
-          </a:xfrm>
-          <a:prstGeom prst="rect">
-            <a:avLst/>
-          </a:prstGeom>
-          <a:noFill/>
-          <a:ln/>
-        </p:spPr>
-        <p:txBody>
-          <a:bodyPr wrap="square" lIns="0" tIns="0" rIns="0" bIns="0" rtlCol="0" anchor="t"/>
-          <a:lstStyle/>
-          <a:p>
-            <a:pPr algn="l" indent="0" marL="0">
-              <a:lnSpc>
-                <a:spcPts val="2640"/>
-              </a:lnSpc>
-              <a:spcAft>
-                <a:spcPts val="1300"/>
-              </a:spcAft>
-              <a:buNone/>
-            </a:pPr>
-            <a:r>
-              <a:rPr lang="en-US" sz="2200" dirty="0">
-                <a:solidFill>
-                  <a:srgbClr val="111111"/>
-                </a:solidFill>
-                <a:latin typeface="Lato" pitchFamily="34" charset="0"/>
-                <a:ea typeface="Lato" pitchFamily="34" charset="-122"/>
-                <a:cs typeface="Lato" pitchFamily="34" charset="-120"/>
-              </a:rPr>
-              <a:t>It means: The PNG was not saved in the same folder, or the picture was linked and not inserted.</a:t>
-            </a:r>
-            <a:endParaRPr lang="en-US" sz="2200" dirty="0"/>
-          </a:p>
-          <a:p>
-            <a:pPr algn="l" indent="0" marL="0">
-              <a:lnSpc>
-                <a:spcPts val="2640"/>
-              </a:lnSpc>
-              <a:spcAft>
-                <a:spcPts val="1300"/>
-              </a:spcAft>
-              <a:buNone/>
-            </a:pPr>
-            <a:r>
-              <a:rPr lang="en-US" sz="2200" dirty="0">
-                <a:solidFill>
-                  <a:srgbClr val="111111"/>
-                </a:solidFill>
-                <a:latin typeface="Lato" pitchFamily="34" charset="0"/>
-                <a:ea typeface="Lato" pitchFamily="34" charset="-122"/>
-                <a:cs typeface="Lato" pitchFamily="34" charset="-120"/>
-              </a:rPr>
-              <a:t>Fix: Insert the saved PNG into the document and export to PDF again.</a:t>
-            </a:r>
-            <a:endParaRPr lang="en-US" sz="2200" dirty="0"/>
-          </a:p>
-        </p:txBody>
-      </p:sp>
       <p:sp>
         <p:nvSpPr>
           <p:cNvPr id="25" name="Slide Number Placeholder 0"/>
@@ -3812,102 +3944,15 @@
                 <a:ea typeface="Lato" pitchFamily="34" charset="-122"/>
                 <a:cs typeface="Lato" pitchFamily="34" charset="-120"/>
               </a:rPr>
-              <a:t>Finish this sentence in your notebook</a:t>
+              <a:t>Two errors you may meet today</a:t>
             </a:r>
             <a:endParaRPr lang="en-US" sz="3800" dirty="0"/>
-          </a:p>
-        </p:txBody>
-      </p:sp>
-      <p:sp>
-        <p:nvSpPr>
-          <p:cNvPr id="3" name="Text 1"/>
-          <p:cNvSpPr txBox="1"/>
-          <p:nvPr/>
-        </p:nvSpPr>
-        <p:spPr>
-          <a:xfrm>
-            <a:off x="640080" y="1737360"/>
-            <a:ext cx="6949440" cy="2926080"/>
-          </a:xfrm>
-          <a:prstGeom prst="rect">
-            <a:avLst/>
-          </a:prstGeom>
-          <a:noFill/>
-          <a:ln/>
-        </p:spPr>
-        <p:txBody>
-          <a:bodyPr wrap="square" lIns="0" tIns="0" rIns="0" bIns="0" rtlCol="0" anchor="t"/>
-          <a:lstStyle/>
-          <a:p>
-            <a:pPr algn="l" indent="0" marL="0">
-              <a:lnSpc>
-                <a:spcPts val="4800"/>
-              </a:lnSpc>
-              <a:spcAft>
-                <a:spcPts val="1010"/>
-              </a:spcAft>
-              <a:buNone/>
-            </a:pPr>
-            <a:r>
-              <a:rPr lang="en-US" sz="4000" dirty="0">
-                <a:solidFill>
-                  <a:srgbClr val="111111"/>
-                </a:solidFill>
-                <a:latin typeface="Lato" pitchFamily="34" charset="0"/>
-                <a:ea typeface="Lato" pitchFamily="34" charset="-122"/>
-                <a:cs typeface="Lato" pitchFamily="34" charset="-120"/>
-              </a:rPr>
-              <a:t>Everything I submitted opens, reruns and agrees with itself.</a:t>
-            </a:r>
-            <a:endParaRPr lang="en-US" sz="4000" dirty="0"/>
-          </a:p>
-        </p:txBody>
-      </p:sp>
-      <p:sp>
-        <p:nvSpPr>
-          <p:cNvPr id="4" name="Text 2"/>
-          <p:cNvSpPr txBox="1"/>
-          <p:nvPr/>
-        </p:nvSpPr>
-        <p:spPr>
-          <a:xfrm>
-            <a:off x="640080" y="4846320"/>
-            <a:ext cx="6949440" cy="1097280"/>
-          </a:xfrm>
-          <a:prstGeom prst="rect">
-            <a:avLst/>
-          </a:prstGeom>
-          <a:noFill/>
-          <a:ln/>
-        </p:spPr>
-        <p:txBody>
-          <a:bodyPr wrap="square" lIns="0" tIns="0" rIns="0" bIns="0" rtlCol="0" anchor="t"/>
-          <a:lstStyle/>
-          <a:p>
-            <a:pPr algn="l" indent="0" marL="0">
-              <a:lnSpc>
-                <a:spcPts val="2750"/>
-              </a:lnSpc>
-              <a:buNone/>
-            </a:pPr>
-            <a:r>
-              <a:rPr lang="en-US" sz="2200" dirty="0">
-                <a:solidFill>
-                  <a:srgbClr val="333333"/>
-                </a:solidFill>
-                <a:latin typeface="Lato" pitchFamily="34" charset="0"/>
-                <a:ea typeface="Lato" pitchFamily="34" charset="-122"/>
-                <a:cs typeface="Lato" pitchFamily="34" charset="-120"/>
-              </a:rPr>
-              <a:t>Then save your notebook, close it and open it again to check it saved.</a:t>
-            </a:r>
-            <a:endParaRPr lang="en-US" sz="2200" dirty="0"/>
           </a:p>
         </p:txBody>
       </p:sp>
       <p:pic>
         <p:nvPicPr>
-          <p:cNvPr id="5" name="Image 0" descr="Finished">    </p:cNvPr>
+          <p:cNvPr id="3" name="Image 0" descr="Error">    </p:cNvPr>
           <p:cNvPicPr>
             <a:picLocks noChangeAspect="1"/>
           </p:cNvPicPr>
@@ -3921,14 +3966,335 @@
         </p:blipFill>
         <p:spPr>
           <a:xfrm>
-            <a:off x="8229600" y="1920240"/>
-            <a:ext cx="3291840" cy="3291840"/>
+            <a:off x="640080" y="1691640"/>
+            <a:ext cx="822960" cy="822960"/>
           </a:xfrm>
           <a:prstGeom prst="rect">
             <a:avLst/>
           </a:prstGeom>
         </p:spPr>
       </p:pic>
+      <p:sp>
+        <p:nvSpPr>
+          <p:cNvPr id="4" name="Shape 1"/>
+          <p:cNvSpPr/>
+          <p:nvPr/>
+        </p:nvSpPr>
+        <p:spPr>
+          <a:xfrm>
+            <a:off x="1645920" y="1828800"/>
+            <a:ext cx="4023360" cy="1645920"/>
+          </a:xfrm>
+          <a:prstGeom prst="roundRect">
+            <a:avLst>
+              <a:gd name="adj" fmla="val 3333"/>
+            </a:avLst>
+          </a:prstGeom>
+          <a:solidFill>
+            <a:srgbClr val="FFFFFF"/>
+          </a:solidFill>
+          <a:ln w="25400">
+            <a:solidFill>
+              <a:srgbClr val="AE2525"/>
+            </a:solidFill>
+            <a:prstDash val="solid"/>
+          </a:ln>
+        </p:spPr>
+      </p:sp>
+      <p:sp>
+        <p:nvSpPr>
+          <p:cNvPr id="5" name="Text 2"/>
+          <p:cNvSpPr txBox="1"/>
+          <p:nvPr/>
+        </p:nvSpPr>
+        <p:spPr>
+          <a:xfrm>
+            <a:off x="1783080" y="1920240"/>
+            <a:ext cx="3749040" cy="1463040"/>
+          </a:xfrm>
+          <a:prstGeom prst="rect">
+            <a:avLst/>
+          </a:prstGeom>
+          <a:noFill/>
+          <a:ln/>
+        </p:spPr>
+        <p:txBody>
+          <a:bodyPr wrap="square" lIns="0" tIns="0" rIns="0" bIns="0" rtlCol="0" anchor="ctr"/>
+          <a:lstStyle/>
+          <a:p>
+            <a:pPr algn="l" indent="0" marL="0">
+              <a:lnSpc>
+                <a:spcPts val="2500"/>
+              </a:lnSpc>
+              <a:buNone/>
+            </a:pPr>
+            <a:r>
+              <a:rPr lang="en-US" sz="2000" dirty="0">
+                <a:solidFill>
+                  <a:srgbClr val="AE2525"/>
+                </a:solidFill>
+                <a:latin typeface="Courier New" pitchFamily="34" charset="0"/>
+                <a:ea typeface="Courier New" pitchFamily="34" charset="-122"/>
+                <a:cs typeface="Courier New" pitchFamily="34" charset="-120"/>
+              </a:rPr>
+              <a:t>A claim in the report has no number behind it</a:t>
+            </a:r>
+            <a:endParaRPr lang="en-US" sz="2000" dirty="0"/>
+          </a:p>
+        </p:txBody>
+      </p:sp>
+      <p:sp>
+        <p:nvSpPr>
+          <p:cNvPr id="6" name="Text 3"/>
+          <p:cNvSpPr txBox="1"/>
+          <p:nvPr/>
+        </p:nvSpPr>
+        <p:spPr>
+          <a:xfrm>
+            <a:off x="6035040" y="1664208"/>
+            <a:ext cx="5486400" cy="1965960"/>
+          </a:xfrm>
+          <a:prstGeom prst="rect">
+            <a:avLst/>
+          </a:prstGeom>
+          <a:noFill/>
+          <a:ln/>
+        </p:spPr>
+        <p:txBody>
+          <a:bodyPr wrap="square" lIns="0" tIns="0" rIns="0" bIns="0" rtlCol="0" anchor="t"/>
+          <a:lstStyle/>
+          <a:p>
+            <a:pPr algn="l" indent="0" marL="0">
+              <a:lnSpc>
+                <a:spcPts val="2640"/>
+              </a:lnSpc>
+              <a:spcAft>
+                <a:spcPts val="1300"/>
+              </a:spcAft>
+              <a:buNone/>
+            </a:pPr>
+            <a:r>
+              <a:rPr lang="en-US" sz="2200" dirty="0">
+                <a:solidFill>
+                  <a:srgbClr val="111111"/>
+                </a:solidFill>
+                <a:latin typeface="Lato" pitchFamily="34" charset="0"/>
+                <a:ea typeface="Lato" pitchFamily="34" charset="-122"/>
+                <a:cs typeface="Lato" pitchFamily="34" charset="-120"/>
+              </a:rPr>
+              <a:t>It means: The sentence was written from memory and not from an output.</a:t>
+            </a:r>
+            <a:endParaRPr lang="en-US" sz="2200" dirty="0"/>
+          </a:p>
+          <a:p>
+            <a:pPr algn="l" indent="0" marL="0">
+              <a:lnSpc>
+                <a:spcPts val="2640"/>
+              </a:lnSpc>
+              <a:spcAft>
+                <a:spcPts val="1300"/>
+              </a:spcAft>
+              <a:buNone/>
+            </a:pPr>
+            <a:r>
+              <a:rPr lang="en-US" sz="2200" dirty="0">
+                <a:solidFill>
+                  <a:srgbClr val="111111"/>
+                </a:solidFill>
+                <a:latin typeface="Lato" pitchFamily="34" charset="0"/>
+                <a:ea typeface="Lato" pitchFamily="34" charset="-122"/>
+                <a:cs typeface="Lato" pitchFamily="34" charset="-120"/>
+              </a:rPr>
+              <a:t>Fix: Find the output cell that supports it, or remove the claim.</a:t>
+            </a:r>
+            <a:endParaRPr lang="en-US" sz="2200" dirty="0"/>
+          </a:p>
+        </p:txBody>
+      </p:sp>
+      <p:sp>
+        <p:nvSpPr>
+          <p:cNvPr id="7" name="Shape 4"/>
+          <p:cNvSpPr/>
+          <p:nvPr/>
+        </p:nvSpPr>
+        <p:spPr>
+          <a:xfrm>
+            <a:off x="640080" y="3813048"/>
+            <a:ext cx="10881360" cy="0"/>
+          </a:xfrm>
+          <a:prstGeom prst="line">
+            <a:avLst/>
+          </a:prstGeom>
+          <a:noFill/>
+          <a:ln w="12700">
+            <a:solidFill>
+              <a:srgbClr val="CFCFCF"/>
+            </a:solidFill>
+            <a:prstDash val="solid"/>
+          </a:ln>
+        </p:spPr>
+      </p:sp>
+      <p:pic>
+        <p:nvPicPr>
+          <p:cNvPr id="8" name="Image 1" descr="Error">    </p:cNvPr>
+          <p:cNvPicPr>
+            <a:picLocks noChangeAspect="1"/>
+          </p:cNvPicPr>
+          <p:nvPr/>
+        </p:nvPicPr>
+        <p:blipFill>
+          <a:blip r:embed="rId2"/>
+          <a:stretch>
+            <a:fillRect/>
+          </a:stretch>
+        </p:blipFill>
+        <p:spPr>
+          <a:xfrm>
+            <a:off x="640080" y="4023360"/>
+            <a:ext cx="822960" cy="822960"/>
+          </a:xfrm>
+          <a:prstGeom prst="rect">
+            <a:avLst/>
+          </a:prstGeom>
+        </p:spPr>
+      </p:pic>
+      <p:sp>
+        <p:nvSpPr>
+          <p:cNvPr id="9" name="Shape 5"/>
+          <p:cNvSpPr/>
+          <p:nvPr/>
+        </p:nvSpPr>
+        <p:spPr>
+          <a:xfrm>
+            <a:off x="1645920" y="4160520"/>
+            <a:ext cx="4023360" cy="1645920"/>
+          </a:xfrm>
+          <a:prstGeom prst="roundRect">
+            <a:avLst>
+              <a:gd name="adj" fmla="val 3333"/>
+            </a:avLst>
+          </a:prstGeom>
+          <a:solidFill>
+            <a:srgbClr val="FFFFFF"/>
+          </a:solidFill>
+          <a:ln w="25400">
+            <a:solidFill>
+              <a:srgbClr val="AE2525"/>
+            </a:solidFill>
+            <a:prstDash val="solid"/>
+          </a:ln>
+        </p:spPr>
+      </p:sp>
+      <p:sp>
+        <p:nvSpPr>
+          <p:cNvPr id="10" name="Text 6"/>
+          <p:cNvSpPr txBox="1"/>
+          <p:nvPr/>
+        </p:nvSpPr>
+        <p:spPr>
+          <a:xfrm>
+            <a:off x="1783080" y="4251960"/>
+            <a:ext cx="3749040" cy="1463040"/>
+          </a:xfrm>
+          <a:prstGeom prst="rect">
+            <a:avLst/>
+          </a:prstGeom>
+          <a:noFill/>
+          <a:ln/>
+        </p:spPr>
+        <p:txBody>
+          <a:bodyPr wrap="square" lIns="0" tIns="0" rIns="0" bIns="0" rtlCol="0" anchor="ctr"/>
+          <a:lstStyle/>
+          <a:p>
+            <a:pPr algn="l" indent="0" marL="0">
+              <a:lnSpc>
+                <a:spcPts val="2500"/>
+              </a:lnSpc>
+              <a:buNone/>
+            </a:pPr>
+            <a:r>
+              <a:rPr lang="en-US" sz="2000" dirty="0">
+                <a:solidFill>
+                  <a:srgbClr val="AE2525"/>
+                </a:solidFill>
+                <a:latin typeface="Courier New" pitchFamily="34" charset="0"/>
+                <a:ea typeface="Courier New" pitchFamily="34" charset="-122"/>
+                <a:cs typeface="Courier New" pitchFamily="34" charset="-120"/>
+              </a:rPr>
+              <a:t>The report opens but the charts are missing</a:t>
+            </a:r>
+            <a:endParaRPr lang="en-US" sz="2000" dirty="0"/>
+          </a:p>
+        </p:txBody>
+      </p:sp>
+      <p:sp>
+        <p:nvSpPr>
+          <p:cNvPr id="11" name="Text 7"/>
+          <p:cNvSpPr txBox="1"/>
+          <p:nvPr/>
+        </p:nvSpPr>
+        <p:spPr>
+          <a:xfrm>
+            <a:off x="6035040" y="3995928"/>
+            <a:ext cx="5486400" cy="1965960"/>
+          </a:xfrm>
+          <a:prstGeom prst="rect">
+            <a:avLst/>
+          </a:prstGeom>
+          <a:noFill/>
+          <a:ln/>
+        </p:spPr>
+        <p:txBody>
+          <a:bodyPr wrap="square" lIns="0" tIns="0" rIns="0" bIns="0" rtlCol="0" anchor="t"/>
+          <a:lstStyle/>
+          <a:p>
+            <a:pPr algn="l" indent="0" marL="0">
+              <a:lnSpc>
+                <a:spcPts val="2640"/>
+              </a:lnSpc>
+              <a:spcAft>
+                <a:spcPts val="1300"/>
+              </a:spcAft>
+              <a:buNone/>
+            </a:pPr>
+            <a:r>
+              <a:rPr lang="en-US" sz="2200" dirty="0">
+                <a:solidFill>
+                  <a:srgbClr val="111111"/>
+                </a:solidFill>
+                <a:latin typeface="Lato" pitchFamily="34" charset="0"/>
+                <a:ea typeface="Lato" pitchFamily="34" charset="-122"/>
+                <a:cs typeface="Lato" pitchFamily="34" charset="-120"/>
+              </a:rPr>
+              <a:t>It means: The PNG was not saved in the same folder, or the picture was linked and not inserted.</a:t>
+            </a:r>
+            <a:endParaRPr lang="en-US" sz="2200" dirty="0"/>
+          </a:p>
+          <a:p>
+            <a:pPr algn="l" indent="0" marL="0">
+              <a:lnSpc>
+                <a:spcPts val="2640"/>
+              </a:lnSpc>
+              <a:spcAft>
+                <a:spcPts val="1300"/>
+              </a:spcAft>
+              <a:buNone/>
+            </a:pPr>
+            <a:r>
+              <a:rPr lang="en-US" sz="2200" dirty="0">
+                <a:solidFill>
+                  <a:srgbClr val="111111"/>
+                </a:solidFill>
+                <a:latin typeface="Lato" pitchFamily="34" charset="0"/>
+                <a:ea typeface="Lato" pitchFamily="34" charset="-122"/>
+                <a:cs typeface="Lato" pitchFamily="34" charset="-120"/>
+              </a:rPr>
+              <a:t>Fix: Insert the saved PNG into the document and export to PDF again.</a:t>
+            </a:r>
+            <a:endParaRPr lang="en-US" sz="2200" dirty="0"/>
+          </a:p>
+        </p:txBody>
+      </p:sp>
       <p:sp>
         <p:nvSpPr>
           <p:cNvPr id="25" name="Slide Number Placeholder 0"/>
